--- a/slides/final.pptx
+++ b/slides/final.pptx
@@ -3832,64 +3832,30 @@
           </a:p>
         </p:txBody>
       </p:sp>
-      <p:sp>
-        <p:nvSpPr>
-          <p:cNvPr id="3" name="Rectangle 2"/>
-          <p:cNvSpPr/>
+      <p:pic>
+        <p:nvPicPr>
+          <p:cNvPr id="3" name="Picture 2" descr="e1_learning_curve.png"/>
+          <p:cNvPicPr>
+            <a:picLocks noChangeAspect="1"/>
+          </p:cNvPicPr>
           <p:nvPr/>
-        </p:nvSpPr>
-        <p:spPr>
-          <a:xfrm>
-            <a:off x="2926080" y="1737360"/>
-            <a:ext cx="6309360" cy="2926080"/>
+        </p:nvPicPr>
+        <p:blipFill>
+          <a:blip r:embed="rId2"/>
+          <a:stretch>
+            <a:fillRect/>
+          </a:stretch>
+        </p:blipFill>
+        <p:spPr>
+          <a:xfrm>
+            <a:off x="2915644" y="1188720"/>
+            <a:ext cx="6360407" cy="4206240"/>
           </a:xfrm>
           <a:prstGeom prst="rect">
             <a:avLst/>
           </a:prstGeom>
-          <a:solidFill>
-            <a:srgbClr val="DDDDDD"/>
-          </a:solidFill>
-          <a:ln>
-            <a:solidFill>
-              <a:srgbClr val="999999"/>
-            </a:solidFill>
-          </a:ln>
-        </p:spPr>
-        <p:style>
-          <a:lnRef idx="1">
-            <a:schemeClr val="accent1"/>
-          </a:lnRef>
-          <a:fillRef idx="3">
-            <a:schemeClr val="accent1"/>
-          </a:fillRef>
-          <a:effectRef idx="2">
-            <a:schemeClr val="accent1"/>
-          </a:effectRef>
-          <a:fontRef idx="minor">
-            <a:schemeClr val="lt1"/>
-          </a:fontRef>
-        </p:style>
-        <p:txBody>
-          <a:bodyPr rtlCol="0" anchor="ctr"/>
-          <a:lstStyle/>
-          <a:p>
-            <a:pPr algn="ctr">
-              <a:defRPr sz="1600"/>
-            </a:pPr>
-            <a:r>
-              <a:t>[占位] e1_learning_curve.png</a:t>
-            </a:r>
-          </a:p>
-          <a:p>
-            <a:pPr algn="ctr">
-              <a:defRPr sz="1600"/>
-            </a:pPr>
-            <a:r>
-              <a:t>跑完实验后重跑 make_slides.py 自动嵌入</a:t>
-            </a:r>
-          </a:p>
-        </p:txBody>
-      </p:sp>
+        </p:spPr>
+      </p:pic>
       <p:sp>
         <p:nvSpPr>
           <p:cNvPr id="4" name="TextBox 3"/>
@@ -3898,7 +3864,7 @@
         </p:nvSpPr>
         <p:spPr>
           <a:xfrm>
-            <a:off x="640080" y="4846320"/>
+            <a:off x="640080" y="5486399"/>
             <a:ext cx="10911535" cy="1280160"/>
           </a:xfrm>
           <a:prstGeom prst="rect">
@@ -3974,64 +3940,30 @@
           </a:p>
         </p:txBody>
       </p:sp>
-      <p:sp>
-        <p:nvSpPr>
-          <p:cNvPr id="3" name="Rectangle 2"/>
-          <p:cNvSpPr/>
+      <p:pic>
+        <p:nvPicPr>
+          <p:cNvPr id="3" name="Picture 2" descr="e1_gap.png"/>
+          <p:cNvPicPr>
+            <a:picLocks noChangeAspect="1"/>
+          </p:cNvPicPr>
           <p:nvPr/>
-        </p:nvSpPr>
-        <p:spPr>
-          <a:xfrm>
-            <a:off x="2926080" y="1737360"/>
-            <a:ext cx="6309360" cy="2926080"/>
+        </p:nvPicPr>
+        <p:blipFill>
+          <a:blip r:embed="rId2"/>
+          <a:stretch>
+            <a:fillRect/>
+          </a:stretch>
+        </p:blipFill>
+        <p:spPr>
+          <a:xfrm>
+            <a:off x="2472400" y="1188720"/>
+            <a:ext cx="7246895" cy="4206240"/>
           </a:xfrm>
           <a:prstGeom prst="rect">
             <a:avLst/>
           </a:prstGeom>
-          <a:solidFill>
-            <a:srgbClr val="DDDDDD"/>
-          </a:solidFill>
-          <a:ln>
-            <a:solidFill>
-              <a:srgbClr val="999999"/>
-            </a:solidFill>
-          </a:ln>
-        </p:spPr>
-        <p:style>
-          <a:lnRef idx="1">
-            <a:schemeClr val="accent1"/>
-          </a:lnRef>
-          <a:fillRef idx="3">
-            <a:schemeClr val="accent1"/>
-          </a:fillRef>
-          <a:effectRef idx="2">
-            <a:schemeClr val="accent1"/>
-          </a:effectRef>
-          <a:fontRef idx="minor">
-            <a:schemeClr val="lt1"/>
-          </a:fontRef>
-        </p:style>
-        <p:txBody>
-          <a:bodyPr rtlCol="0" anchor="ctr"/>
-          <a:lstStyle/>
-          <a:p>
-            <a:pPr algn="ctr">
-              <a:defRPr sz="1600"/>
-            </a:pPr>
-            <a:r>
-              <a:t>[占位] e1_gap.png</a:t>
-            </a:r>
-          </a:p>
-          <a:p>
-            <a:pPr algn="ctr">
-              <a:defRPr sz="1600"/>
-            </a:pPr>
-            <a:r>
-              <a:t>跑完实验后重跑 make_slides.py 自动嵌入</a:t>
-            </a:r>
-          </a:p>
-        </p:txBody>
-      </p:sp>
+        </p:spPr>
+      </p:pic>
       <p:sp>
         <p:nvSpPr>
           <p:cNvPr id="4" name="TextBox 3"/>
@@ -4040,7 +3972,7 @@
         </p:nvSpPr>
         <p:spPr>
           <a:xfrm>
-            <a:off x="640080" y="4846320"/>
+            <a:off x="640080" y="5486399"/>
             <a:ext cx="10911535" cy="1280160"/>
           </a:xfrm>
           <a:prstGeom prst="rect">

--- a/slides/final.pptx
+++ b/slides/final.pptx
@@ -3142,8 +3142,8 @@
         </p:nvSpPr>
         <p:spPr>
           <a:xfrm>
-            <a:off x="640080" y="1828800"/>
-            <a:ext cx="10911535" cy="4663440"/>
+            <a:off x="640080" y="1645920"/>
+            <a:ext cx="10911535" cy="4846320"/>
           </a:xfrm>
           <a:prstGeom prst="rect">
             <a:avLst/>
@@ -3160,7 +3160,7 @@
               <a:spcAft>
                 <a:spcPts val="600"/>
               </a:spcAft>
-              <a:defRPr sz="2000"/>
+              <a:defRPr sz="1900"/>
             </a:pPr>
             <a:r>
               <a:t>CSI 436/536 · Project P · Final · Group: [组员姓名]</a:t>
@@ -3171,10 +3171,10 @@
               <a:spcAft>
                 <a:spcPts val="600"/>
               </a:spcAft>
-              <a:defRPr sz="2000"/>
-            </a:pPr>
-            <a:r>
-              <a:t>一句话结论（跑完后填数字）：在推理步骤判错任务上，预训练表征</a:t>
+              <a:defRPr sz="1900"/>
+            </a:pPr>
+            <a:r>
+              <a:t>一句话结论（PRM800K，10 种子，SVM）：预训练表征的价值高度依赖评测制度</a:t>
             </a:r>
           </a:p>
           <a:p>
@@ -3182,10 +3182,10 @@
               <a:spcAft>
                 <a:spcPts val="600"/>
               </a:spcAft>
-              <a:defRPr sz="1800"/>
-            </a:pPr>
-            <a:r>
-              <a:t>把达到 AUROC __ 所需标注量降低约 __ 倍（Δ(n) 峰值在 n=__ 处，Δ=__）</a:t>
+              <a:defRPr sz="1700"/>
+            </a:pPr>
+            <a:r>
+              <a:t>同分布全量数据：Δ = −0.045 ~ −0.064 AUROC——预训练不提升，TF-IDF 反而更好（CI 不含 0）</a:t>
             </a:r>
           </a:p>
           <a:p>
@@ -3193,10 +3193,32 @@
               <a:spcAft>
                 <a:spcPts val="600"/>
               </a:spcAft>
-              <a:defRPr sz="1800"/>
-            </a:pPr>
-            <a:r>
-              <a:t>分布偏移下 Δ = __（仍为正/归零）；扰动下 Δ = __</a:t>
+              <a:defRPr sz="1700"/>
+            </a:pPr>
+            <a:r>
+              <a:t>小样本端 n=20：所有特征 ≈ 0.51（近随机），预训练没有买到 sample efficiency</a:t>
+            </a:r>
+          </a:p>
+          <a:p>
+            <a:pPr lvl="1">
+              <a:spcAft>
+                <a:spcPts val="600"/>
+              </a:spcAft>
+              <a:defRPr sz="1700"/>
+            </a:pPr>
+            <a:r>
+              <a:t>分布偏移（MATH→GSM8K）：bge-large Δ = +0.020，CI[0.018, 0.021]，显著为正</a:t>
+            </a:r>
+          </a:p>
+          <a:p>
+            <a:pPr lvl="1">
+              <a:spcAft>
+                <a:spcPts val="600"/>
+              </a:spcAft>
+              <a:defRPr sz="1700"/>
+            </a:pPr>
+            <a:r>
+              <a:t>规则扰动：embedding 衰减 ≤ TF-IDF，但所有衰减 ≤ 0.007 AUROC</a:t>
             </a:r>
           </a:p>
         </p:txBody>
@@ -3305,7 +3327,7 @@
               <a:defRPr sz="1900"/>
             </a:pPr>
             <a:r>
-              <a:t>（可选）E5 拒答机制：风险-覆盖率曲线</a:t>
+              <a:t>E5 拒答机制：risk@coverage=1.0 TF-IDF 0.271 略优于 embedding（0.276–0.278），优势不大</a:t>
             </a:r>
           </a:p>
           <a:p>
@@ -3316,7 +3338,7 @@
               <a:defRPr sz="1900"/>
             </a:pPr>
             <a:r>
-              <a:t>（可选）E6 初步观察：训练集散度统计量 vs 实测 Δ，n=4 点，仅作 future work</a:t>
+              <a:t>E6 初步观察：训练集散度统计量与实测 Δ 同号，Spearman ρ=0.90（p=0.037，n=4），仅作 future work</a:t>
             </a:r>
           </a:p>
         </p:txBody>
@@ -3425,7 +3447,7 @@
               <a:defRPr sz="2000"/>
             </a:pPr>
             <a:r>
-              <a:t>Δ ≈ 0 的区域如实报告为边界，不是失败</a:t>
+              <a:t>Δ &lt; 0 的同分布结论如实报告为边界；训练集天然 28/72 不平衡，补做 50/50 重采样稳健性检验（AUROC 变化 &lt; 0.01）</a:t>
             </a:r>
           </a:p>
         </p:txBody>
@@ -3665,7 +3687,7 @@
               <a:defRPr sz="2000"/>
             </a:pPr>
             <a:r>
-              <a:t>任务载体：数学推理步骤判对错（PRM800K 人工标签）</a:t>
+              <a:t>任务载体：数学推理步骤判对错（PRM800K 人工标签，错例占 27.9%）</a:t>
             </a:r>
           </a:p>
         </p:txBody>
@@ -3834,7 +3856,7 @@
       </p:sp>
       <p:pic>
         <p:nvPicPr>
-          <p:cNvPr id="3" name="Picture 2" descr="e1_learning_curve.png"/>
+          <p:cNvPr id="3" name="Picture 2" descr="e1_learning_curve_svm.png"/>
           <p:cNvPicPr>
             <a:picLocks noChangeAspect="1"/>
           </p:cNvPicPr>
@@ -3848,8 +3870,8 @@
         </p:blipFill>
         <p:spPr>
           <a:xfrm>
-            <a:off x="2915644" y="1188720"/>
-            <a:ext cx="6360407" cy="4206240"/>
+            <a:off x="2867150" y="1188720"/>
+            <a:ext cx="6457395" cy="4206240"/>
           </a:xfrm>
           <a:prstGeom prst="rect">
             <a:avLst/>
@@ -3882,7 +3904,15 @@
               <a:defRPr sz="1500"/>
             </a:pPr>
             <a:r>
-              <a:t>左/本图：学习曲线（均值 ± 95% 区间）；结论句：预训练表征在小样本端把所需标注量降低约 __ 倍</a:t>
+              <a:t>学习曲线（SVM，均值 ± 95% 区间）：n=20 时各特征均 ≈ 0.51（近随机，区间重叠）；n ≥ 50 起 TF-IDF 持续领先</a:t>
+            </a:r>
+          </a:p>
+          <a:p>
+            <a:pPr>
+              <a:defRPr sz="1500"/>
+            </a:pPr>
+            <a:r>
+              <a:t>结论句（差值语言）：在本任务上预训练表征未能降低所需标注量——任何 n 处 Δ ≤ 0</a:t>
             </a:r>
           </a:p>
         </p:txBody>
@@ -3942,7 +3972,7 @@
       </p:sp>
       <p:pic>
         <p:nvPicPr>
-          <p:cNvPr id="3" name="Picture 2" descr="e1_gap.png"/>
+          <p:cNvPr id="3" name="Picture 2" descr="e1_gap_svm.png"/>
           <p:cNvPicPr>
             <a:picLocks noChangeAspect="1"/>
           </p:cNvPicPr>
@@ -3956,8 +3986,8 @@
         </p:blipFill>
         <p:spPr>
           <a:xfrm>
-            <a:off x="2472400" y="1188720"/>
-            <a:ext cx="7246895" cy="4206240"/>
+            <a:off x="2469584" y="1188720"/>
+            <a:ext cx="7252526" cy="4206240"/>
           </a:xfrm>
           <a:prstGeom prst="rect">
             <a:avLst/>
@@ -3990,7 +4020,7 @@
               <a:defRPr sz="1500"/>
             </a:pPr>
             <a:r>
-              <a:t>Δ(n) = AUROC(embedding) − AUROC(TF-IDF)；峰值位置 = “何时帮助最大”的量化答案</a:t>
+              <a:t>Δ(n) = AUROC(embedding) − AUROC(TF-IDF)：gap 全程非正且随 n 单调走负，full 端 −0.045 ~ −0.064</a:t>
             </a:r>
           </a:p>
           <a:p>
@@ -3998,7 +4028,7 @@
               <a:defRPr sz="1500"/>
             </a:pPr>
             <a:r>
-              <a:t>预登记预测 1（峰值在 n ≤ 100）：[成立 / 部分成立 / 不成立，如实填]</a:t>
+              <a:t>预登记预测 1（峰值在 n ≤ 100）：不成立——峰值不在小样本端，小样本端所有特征都还在随机水平</a:t>
             </a:r>
           </a:p>
         </p:txBody>
@@ -4056,64 +4086,30 @@
           </a:p>
         </p:txBody>
       </p:sp>
-      <p:sp>
-        <p:nvSpPr>
-          <p:cNvPr id="3" name="Rectangle 2"/>
-          <p:cNvSpPr/>
+      <p:pic>
+        <p:nvPicPr>
+          <p:cNvPr id="3" name="Picture 2" descr="e3_generalization_svm.png"/>
+          <p:cNvPicPr>
+            <a:picLocks noChangeAspect="1"/>
+          </p:cNvPicPr>
           <p:nvPr/>
-        </p:nvSpPr>
-        <p:spPr>
-          <a:xfrm>
-            <a:off x="2926080" y="1737360"/>
-            <a:ext cx="6309360" cy="2926080"/>
+        </p:nvPicPr>
+        <p:blipFill>
+          <a:blip r:embed="rId2"/>
+          <a:stretch>
+            <a:fillRect/>
+          </a:stretch>
+        </p:blipFill>
+        <p:spPr>
+          <a:xfrm>
+            <a:off x="2366854" y="1188720"/>
+            <a:ext cx="7457987" cy="4206240"/>
           </a:xfrm>
           <a:prstGeom prst="rect">
             <a:avLst/>
           </a:prstGeom>
-          <a:solidFill>
-            <a:srgbClr val="DDDDDD"/>
-          </a:solidFill>
-          <a:ln>
-            <a:solidFill>
-              <a:srgbClr val="999999"/>
-            </a:solidFill>
-          </a:ln>
-        </p:spPr>
-        <p:style>
-          <a:lnRef idx="1">
-            <a:schemeClr val="accent1"/>
-          </a:lnRef>
-          <a:fillRef idx="3">
-            <a:schemeClr val="accent1"/>
-          </a:fillRef>
-          <a:effectRef idx="2">
-            <a:schemeClr val="accent1"/>
-          </a:effectRef>
-          <a:fontRef idx="minor">
-            <a:schemeClr val="lt1"/>
-          </a:fontRef>
-        </p:style>
-        <p:txBody>
-          <a:bodyPr rtlCol="0" anchor="ctr"/>
-          <a:lstStyle/>
-          <a:p>
-            <a:pPr algn="ctr">
-              <a:defRPr sz="1600"/>
-            </a:pPr>
-            <a:r>
-              <a:t>[占位] e3_generalization.png</a:t>
-            </a:r>
-          </a:p>
-          <a:p>
-            <a:pPr algn="ctr">
-              <a:defRPr sz="1600"/>
-            </a:pPr>
-            <a:r>
-              <a:t>跑完实验后重跑 make_slides.py 自动嵌入</a:t>
-            </a:r>
-          </a:p>
-        </p:txBody>
-      </p:sp>
+        </p:spPr>
+      </p:pic>
       <p:sp>
         <p:nvSpPr>
           <p:cNvPr id="4" name="TextBox 3"/>
@@ -4122,7 +4118,7 @@
         </p:nvSpPr>
         <p:spPr>
           <a:xfrm>
-            <a:off x="640080" y="4846320"/>
+            <a:off x="640080" y="5486399"/>
             <a:ext cx="10911535" cy="1280160"/>
           </a:xfrm>
           <a:prstGeom prst="rect">
@@ -4140,7 +4136,7 @@
               <a:defRPr sz="1500"/>
             </a:pPr>
             <a:r>
-              <a:t>MATH→GSM8K 为复合分布偏移（题型+来源+标签方式），不作单因素归因</a:t>
+              <a:t>同分布端 TF-IDF 更高（0.696 vs 0.650）；迁移端反转：bge-large 0.571 vs TF-IDF 0.551</a:t>
             </a:r>
           </a:p>
           <a:p>
@@ -4148,7 +4144,15 @@
               <a:defRPr sz="1500"/>
             </a:pPr>
             <a:r>
-              <a:t>预登记预测 2（偏移下 Δ 仍为正）：[成立 / 部分成立 / 不成立]</a:t>
+              <a:t>paired bootstrap (1000 次)：bge-large Δ=+0.020 CI[0.018,0.021]，bge-base +0.006 CI[0.004,0.008]，MiniLM −0.001 跨 0</a:t>
+            </a:r>
+          </a:p>
+          <a:p>
+            <a:pPr>
+              <a:defRPr sz="1500"/>
+            </a:pPr>
+            <a:r>
+              <a:t>预登记预测 2（偏移下 Δ 仍为正）：部分成立——bge 系显著为正，MiniLM 不显著；复合偏移不作单因素归因</a:t>
             </a:r>
           </a:p>
         </p:txBody>
@@ -4206,64 +4210,30 @@
           </a:p>
         </p:txBody>
       </p:sp>
-      <p:sp>
-        <p:nvSpPr>
-          <p:cNvPr id="3" name="Rectangle 2"/>
-          <p:cNvSpPr/>
+      <p:pic>
+        <p:nvPicPr>
+          <p:cNvPr id="3" name="Picture 2" descr="e3_train_test_svm.png"/>
+          <p:cNvPicPr>
+            <a:picLocks noChangeAspect="1"/>
+          </p:cNvPicPr>
           <p:nvPr/>
-        </p:nvSpPr>
-        <p:spPr>
-          <a:xfrm>
-            <a:off x="2926080" y="1737360"/>
-            <a:ext cx="6309360" cy="2926080"/>
+        </p:nvPicPr>
+        <p:blipFill>
+          <a:blip r:embed="rId2"/>
+          <a:stretch>
+            <a:fillRect/>
+          </a:stretch>
+        </p:blipFill>
+        <p:spPr>
+          <a:xfrm>
+            <a:off x="1958415" y="1188720"/>
+            <a:ext cx="8274865" cy="4206240"/>
           </a:xfrm>
           <a:prstGeom prst="rect">
             <a:avLst/>
           </a:prstGeom>
-          <a:solidFill>
-            <a:srgbClr val="DDDDDD"/>
-          </a:solidFill>
-          <a:ln>
-            <a:solidFill>
-              <a:srgbClr val="999999"/>
-            </a:solidFill>
-          </a:ln>
-        </p:spPr>
-        <p:style>
-          <a:lnRef idx="1">
-            <a:schemeClr val="accent1"/>
-          </a:lnRef>
-          <a:fillRef idx="3">
-            <a:schemeClr val="accent1"/>
-          </a:fillRef>
-          <a:effectRef idx="2">
-            <a:schemeClr val="accent1"/>
-          </a:effectRef>
-          <a:fontRef idx="minor">
-            <a:schemeClr val="lt1"/>
-          </a:fontRef>
-        </p:style>
-        <p:txBody>
-          <a:bodyPr rtlCol="0" anchor="ctr"/>
-          <a:lstStyle/>
-          <a:p>
-            <a:pPr algn="ctr">
-              <a:defRPr sz="1600"/>
-            </a:pPr>
-            <a:r>
-              <a:t>[占位] e3_train_test.png</a:t>
-            </a:r>
-          </a:p>
-          <a:p>
-            <a:pPr algn="ctr">
-              <a:defRPr sz="1600"/>
-            </a:pPr>
-            <a:r>
-              <a:t>跑完实验后重跑 make_slides.py 自动嵌入</a:t>
-            </a:r>
-          </a:p>
-        </p:txBody>
-      </p:sp>
+        </p:spPr>
+      </p:pic>
       <p:sp>
         <p:nvSpPr>
           <p:cNvPr id="4" name="TextBox 3"/>
@@ -4272,7 +4242,7 @@
         </p:nvSpPr>
         <p:spPr>
           <a:xfrm>
-            <a:off x="640080" y="4846320"/>
+            <a:off x="640080" y="5486399"/>
             <a:ext cx="10911535" cy="1280160"/>
           </a:xfrm>
           <a:prstGeom prst="rect">
@@ -4290,7 +4260,15 @@
               <a:defRPr sz="1500"/>
             </a:pPr>
             <a:r>
-              <a:t>train/test 差距 = 过拟合视角的 generalization（L06–L07）</a:t>
+              <a:t>train−test gap：TF-IDF 0.153–0.168，embedding 仅 0.040–0.065</a:t>
+            </a:r>
+          </a:p>
+          <a:p>
+            <a:pPr>
+              <a:defRPr sz="1500"/>
+            </a:pPr>
+            <a:r>
+              <a:t>TF-IDF 拟合了大量只在 MATH 内有效的表面特征；embedding 表示更“抗过拟合”，迁移端衰减更小（−0.08 vs −0.14）</a:t>
             </a:r>
           </a:p>
         </p:txBody>
@@ -4348,64 +4326,30 @@
           </a:p>
         </p:txBody>
       </p:sp>
-      <p:sp>
-        <p:nvSpPr>
-          <p:cNvPr id="3" name="Rectangle 2"/>
-          <p:cNvSpPr/>
+      <p:pic>
+        <p:nvPicPr>
+          <p:cNvPr id="3" name="Picture 2" descr="e4_robustness_svm.png"/>
+          <p:cNvPicPr>
+            <a:picLocks noChangeAspect="1"/>
+          </p:cNvPicPr>
           <p:nvPr/>
-        </p:nvSpPr>
-        <p:spPr>
-          <a:xfrm>
-            <a:off x="2926080" y="1737360"/>
-            <a:ext cx="6309360" cy="2926080"/>
+        </p:nvPicPr>
+        <p:blipFill>
+          <a:blip r:embed="rId2"/>
+          <a:stretch>
+            <a:fillRect/>
+          </a:stretch>
+        </p:blipFill>
+        <p:spPr>
+          <a:xfrm>
+            <a:off x="2207772" y="1188720"/>
+            <a:ext cx="7776151" cy="4206240"/>
           </a:xfrm>
           <a:prstGeom prst="rect">
             <a:avLst/>
           </a:prstGeom>
-          <a:solidFill>
-            <a:srgbClr val="DDDDDD"/>
-          </a:solidFill>
-          <a:ln>
-            <a:solidFill>
-              <a:srgbClr val="999999"/>
-            </a:solidFill>
-          </a:ln>
-        </p:spPr>
-        <p:style>
-          <a:lnRef idx="1">
-            <a:schemeClr val="accent1"/>
-          </a:lnRef>
-          <a:fillRef idx="3">
-            <a:schemeClr val="accent1"/>
-          </a:fillRef>
-          <a:effectRef idx="2">
-            <a:schemeClr val="accent1"/>
-          </a:effectRef>
-          <a:fontRef idx="minor">
-            <a:schemeClr val="lt1"/>
-          </a:fontRef>
-        </p:style>
-        <p:txBody>
-          <a:bodyPr rtlCol="0" anchor="ctr"/>
-          <a:lstStyle/>
-          <a:p>
-            <a:pPr algn="ctr">
-              <a:defRPr sz="1600"/>
-            </a:pPr>
-            <a:r>
-              <a:t>[占位] e4_robustness.png</a:t>
-            </a:r>
-          </a:p>
-          <a:p>
-            <a:pPr algn="ctr">
-              <a:defRPr sz="1600"/>
-            </a:pPr>
-            <a:r>
-              <a:t>跑完实验后重跑 make_slides.py 自动嵌入</a:t>
-            </a:r>
-          </a:p>
-        </p:txBody>
-      </p:sp>
+        </p:spPr>
+      </p:pic>
       <p:sp>
         <p:nvSpPr>
           <p:cNvPr id="4" name="TextBox 3"/>
@@ -4414,7 +4358,7 @@
         </p:nvSpPr>
         <p:spPr>
           <a:xfrm>
-            <a:off x="640080" y="4846320"/>
+            <a:off x="640080" y="5486399"/>
             <a:ext cx="10911535" cy="1280160"/>
           </a:xfrm>
           <a:prstGeom prst="rect">
@@ -4432,7 +4376,7 @@
               <a:defRPr sz="1500"/>
             </a:pPr>
             <a:r>
-              <a:t>规则式扰动（typo / 数字格式 / LaTeX）下的 AUROC 衰减；</a:t>
+              <a:t>规则式扰动（typo / 数字格式 / LaTeX）下所有特征衰减都很小（≤ 0.007 AUROC）</a:t>
             </a:r>
           </a:p>
           <a:p>
@@ -4440,7 +4384,15 @@
               <a:defRPr sz="1500"/>
             </a:pPr>
             <a:r>
-              <a:t>预登记预测 3（embedding 衰减 ≤ TF-IDF）：[成立 / 部分成立 / 不成立]</a:t>
+              <a:t>latex / combo 下 embedding 衰减（≤ 0.002）≤ TF-IDF（最大 0.005–0.007）</a:t>
+            </a:r>
+          </a:p>
+          <a:p>
+            <a:pPr>
+              <a:defRPr sz="1500"/>
+            </a:pPr>
+            <a:r>
+              <a:t>预登记预测 3（embedding 衰减 ≤ TF-IDF）：成立——但效应量小，方向性结论</a:t>
             </a:r>
           </a:p>
         </p:txBody>
@@ -4527,7 +4479,7 @@
               <a:defRPr sz="2000"/>
             </a:pPr>
             <a:r>
-              <a:t>量化答案 = 三条 gap 曲线的峰值与归零位置（跑完后填数字）</a:t>
+              <a:t>量化答案 = 三条 gap 曲线的实测形态</a:t>
             </a:r>
           </a:p>
           <a:p>
@@ -4538,7 +4490,7 @@
               <a:defRPr sz="1800"/>
             </a:pPr>
             <a:r>
-              <a:t>n 轴：Δ 峰值在 n = __；大 n 端收窄到 __</a:t>
+              <a:t>n 轴：Δ 最接近 0 处在 n=20（≈ 0，但大家都在随机水平）；随 n 增大走负，full 端 −0.045 ~ −0.064</a:t>
             </a:r>
           </a:p>
           <a:p>
@@ -4549,7 +4501,7 @@
               <a:defRPr sz="1800"/>
             </a:pPr>
             <a:r>
-              <a:t>偏移轴：Δ = __；扰动轴：衰减差 = __</a:t>
+              <a:t>偏移轴：bge-large Δ = +0.020（显著正）；扰动轴：衰减差 ≤ 0.005（embedding 略优）</a:t>
             </a:r>
           </a:p>
           <a:p>
@@ -4560,7 +4512,18 @@
               <a:defRPr sz="2000"/>
             </a:pPr>
             <a:r>
-              <a:t>一句话：外部预训练特征在“本地数据买不起低 test loss 的制度”最值钱</a:t>
+              <a:t>一句话修正版：预训练特征不是在“数据少”时最值钱，而是在“分布会漂”时最值钱</a:t>
+            </a:r>
+          </a:p>
+          <a:p>
+            <a:pPr>
+              <a:spcAft>
+                <a:spcPts val="600"/>
+              </a:spcAft>
+              <a:defRPr sz="2000"/>
+            </a:pPr>
+            <a:r>
+              <a:t>本任务同分布端收益为负 = 如实报告的边界结论</a:t>
             </a:r>
           </a:p>
         </p:txBody>

--- a/slides/final.pptx
+++ b/slides/final.pptx
@@ -3163,7 +3163,7 @@
               <a:defRPr sz="1900"/>
             </a:pPr>
             <a:r>
-              <a:t>CSI 436/536 · Project P · Final · Group: [组员姓名]</a:t>
+              <a:t>CSI 436/536 · Project P · Final · Group: Jiayu Liao; Zeyu Pan; Yuhan Sun</a:t>
             </a:r>
           </a:p>
           <a:p>

--- a/slides/final.pptx
+++ b/slides/final.pptx
@@ -3796,7 +3796,7 @@
               <a:defRPr sz="2000"/>
             </a:pPr>
             <a:r>
-              <a:t>预登记 3 条预测，本节末逐条对照成立与否</a:t>
+              <a:t>10 种子分层抽样，均值 ± 区间；稳健性补查（50/50 重采样）AUROC 变化 &lt; 0.01</a:t>
             </a:r>
           </a:p>
         </p:txBody>
@@ -4028,7 +4028,7 @@
               <a:defRPr sz="1500"/>
             </a:pPr>
             <a:r>
-              <a:t>预登记预测 1（峰值在 n ≤ 100）：不成立——峰值不在小样本端，小样本端所有特征都还在随机水平</a:t>
+              <a:t>同分布结论：任何 n 处 Δ ≤ 0——小样本端所有特征都还在随机水平，大样本端 TF-IDF 显著领先（CI 不含 0）</a:t>
             </a:r>
           </a:p>
         </p:txBody>
@@ -4152,7 +4152,7 @@
               <a:defRPr sz="1500"/>
             </a:pPr>
             <a:r>
-              <a:t>预登记预测 2（偏移下 Δ 仍为正）：部分成立——bge 系显著为正，MiniLM 不显著；复合偏移不作单因素归因</a:t>
+              <a:t>结论：bge 系迁移端显著反超，MiniLM 不显著；复合偏移不作单因素归因</a:t>
             </a:r>
           </a:p>
         </p:txBody>
@@ -4392,7 +4392,7 @@
               <a:defRPr sz="1500"/>
             </a:pPr>
             <a:r>
-              <a:t>预登记预测 3（embedding 衰减 ≤ TF-IDF）：成立——但效应量小，方向性结论</a:t>
+              <a:t>结论：embedding 衰减 ≤ TF-IDF——但效应量小，方向性结论</a:t>
             </a:r>
           </a:p>
         </p:txBody>

--- a/slides/final.pptx
+++ b/slides/final.pptx
@@ -17,6 +17,7 @@
     <p:sldId id="265" r:id="rId16"/>
     <p:sldId id="266" r:id="rId17"/>
     <p:sldId id="267" r:id="rId18"/>
+    <p:sldId id="268" r:id="rId19"/>
   </p:sldIdLst>
   <p:sldSz cx="12191695" cy="6858000" type="screen4x3"/>
   <p:notesSz cx="6858000" cy="9144000"/>
@@ -3185,7 +3186,7 @@
               <a:defRPr sz="1700"/>
             </a:pPr>
             <a:r>
-              <a:t>同分布全量数据：Δ = −0.045 ~ −0.064 AUROC——预训练不提升，TF-IDF 反而更好（CI 不含 0）</a:t>
+              <a:t>同分布全量数据（主设定）：Δ = −0.045 ~ −0.064 AUROC——预训练不提升，TF-IDF 反而更好（CI 不含 0）</a:t>
             </a:r>
           </a:p>
           <a:p>
@@ -3196,7 +3197,7 @@
               <a:defRPr sz="1700"/>
             </a:pPr>
             <a:r>
-              <a:t>小样本端 n=20：所有特征 ≈ 0.51（近随机），预训练没有买到 sample efficiency</a:t>
+              <a:t>但输入消融（E7）：step-only 输入下 bge-large 0.711 反超 TF-IDF 0.708——同分布负 Δ 大半是输入构造的产物</a:t>
             </a:r>
           </a:p>
           <a:p>
@@ -3207,7 +3208,18 @@
               <a:defRPr sz="1700"/>
             </a:pPr>
             <a:r>
-              <a:t>分布偏移（MATH→GSM8K）：bge-large Δ = +0.020，CI[0.018, 0.021]，显著为正</a:t>
+              <a:t>小样本端 n=20：所有特征 ≈ 0.51（近随机），预训练没有买到 sample efficiency</a:t>
+            </a:r>
+          </a:p>
+          <a:p>
+            <a:pPr lvl="1">
+              <a:spcAft>
+                <a:spcPts val="600"/>
+              </a:spcAft>
+              <a:defRPr sz="1700"/>
+            </a:pPr>
+            <a:r>
+              <a:t>分布偏移（MATH→GSM8K）：bge 系出现小幅但显著的收益，Δ = +0.006 ~ +0.020（CI 不含 0；MiniLM 不显著）</a:t>
             </a:r>
           </a:p>
           <a:p>
@@ -3271,7 +3283,7 @@
               </a:defRPr>
             </a:pPr>
             <a:r>
-              <a:t>Novelty (1.6) &amp; optional analyses</a:t>
+              <a:t>When do pretrained representations help most?</a:t>
             </a:r>
           </a:p>
         </p:txBody>
@@ -3302,10 +3314,10 @@
               <a:spcAft>
                 <a:spcPts val="600"/>
               </a:spcAft>
-              <a:defRPr sz="1900"/>
-            </a:pPr>
-            <a:r>
-              <a:t>三个预训练表征（MiniLM / bge-base / bge-large）× 两种分类器</a:t>
+              <a:defRPr sz="2000"/>
+            </a:pPr>
+            <a:r>
+              <a:t>量化答案 = 三条 gap 曲线的实测形态</a:t>
             </a:r>
           </a:p>
           <a:p>
@@ -3313,21 +3325,21 @@
               <a:spcAft>
                 <a:spcPts val="600"/>
               </a:spcAft>
-              <a:defRPr sz="1700"/>
-            </a:pPr>
-            <a:r>
-              <a:t>注：家族与维度不同，只表述为模型间对比，不声称纯规模效应</a:t>
-            </a:r>
-          </a:p>
-          <a:p>
-            <a:pPr>
+              <a:defRPr sz="1800"/>
+            </a:pPr>
+            <a:r>
+              <a:t>n 轴：Δ 最接近 0 处在 n=20（≈ 0，但大家都在随机水平）；随 n 增大走负，full 端 −0.045 ~ −0.064</a:t>
+            </a:r>
+          </a:p>
+          <a:p>
+            <a:pPr lvl="1">
               <a:spcAft>
                 <a:spcPts val="600"/>
               </a:spcAft>
-              <a:defRPr sz="1900"/>
-            </a:pPr>
-            <a:r>
-              <a:t>E5 拒答机制：risk@coverage=1.0 TF-IDF 0.271 略优于 embedding（0.276–0.278），优势不大</a:t>
+              <a:defRPr sz="1800"/>
+            </a:pPr>
+            <a:r>
+              <a:t>偏移轴：bge 系 Δ = +0.006 ~ +0.020（小幅但显著）；扰动轴：衰减差 ≤ 0.005（embedding 略优）</a:t>
             </a:r>
           </a:p>
           <a:p>
@@ -3335,10 +3347,21 @@
               <a:spcAft>
                 <a:spcPts val="600"/>
               </a:spcAft>
-              <a:defRPr sz="1900"/>
-            </a:pPr>
-            <a:r>
-              <a:t>E6 初步观察：训练集散度统计量与实测 Δ 同号，Spearman ρ=0.90（p=0.037，n=4），仅作 future work</a:t>
+              <a:defRPr sz="2000"/>
+            </a:pPr>
+            <a:r>
+              <a:t>一句话修正版：预训练特征的价值不在“数据少”的制度，而在“分布会漂”的制度（但幅度小）</a:t>
+            </a:r>
+          </a:p>
+          <a:p>
+            <a:pPr>
+              <a:spcAft>
+                <a:spcPts val="600"/>
+              </a:spcAft>
+              <a:defRPr sz="2000"/>
+            </a:pPr>
+            <a:r>
+              <a:t>本任务同分布端收益为负 = 如实报告的边界结论</a:t>
             </a:r>
           </a:p>
         </p:txBody>
@@ -3391,7 +3414,7 @@
               </a:defRPr>
             </a:pPr>
             <a:r>
-              <a:t>Limitations &amp; honest boundaries</a:t>
+              <a:t>Novelty (1.6) &amp; optional analyses</a:t>
             </a:r>
           </a:p>
         </p:txBody>
@@ -3422,21 +3445,21 @@
               <a:spcAft>
                 <a:spcPts val="600"/>
               </a:spcAft>
-              <a:defRPr sz="2000"/>
-            </a:pPr>
-            <a:r>
-              <a:t>只覆盖静态错误识别；不研究对抗性躲避（需 RL，超出课程范围）</a:t>
-            </a:r>
-          </a:p>
-          <a:p>
-            <a:pPr>
+              <a:defRPr sz="1900"/>
+            </a:pPr>
+            <a:r>
+              <a:t>三个预训练表征（MiniLM / bge-base / bge-large）× 两种分类器</a:t>
+            </a:r>
+          </a:p>
+          <a:p>
+            <a:pPr lvl="1">
               <a:spcAft>
                 <a:spcPts val="600"/>
               </a:spcAft>
-              <a:defRPr sz="2000"/>
-            </a:pPr>
-            <a:r>
-              <a:t>复合分布偏移不做单因素归因；小样本结论均带区间</a:t>
+              <a:defRPr sz="1700"/>
+            </a:pPr>
+            <a:r>
+              <a:t>注：家族与维度不同，只表述为模型间对比，不声称纯规模效应</a:t>
             </a:r>
           </a:p>
           <a:p>
@@ -3444,10 +3467,21 @@
               <a:spcAft>
                 <a:spcPts val="600"/>
               </a:spcAft>
-              <a:defRPr sz="2000"/>
-            </a:pPr>
-            <a:r>
-              <a:t>Δ &lt; 0 的同分布结论如实报告为边界；训练集天然 28/72 不平衡，补做 50/50 重采样稳健性检验（AUROC 变化 &lt; 0.01）</a:t>
+              <a:defRPr sz="1900"/>
+            </a:pPr>
+            <a:r>
+              <a:t>E5 拒答机制：risk@coverage=1.0 TF-IDF 0.271 略优于 embedding（0.276–0.278），优势不大</a:t>
+            </a:r>
+          </a:p>
+          <a:p>
+            <a:pPr>
+              <a:spcAft>
+                <a:spcPts val="600"/>
+              </a:spcAft>
+              <a:defRPr sz="1900"/>
+            </a:pPr>
+            <a:r>
+              <a:t>E6 初步观察：训练集散度统计量与实测 Δ 同号，Spearman ρ=0.90（p=0.037，n=4），仅作 future work</a:t>
             </a:r>
           </a:p>
         </p:txBody>
@@ -3500,6 +3534,137 @@
               </a:defRPr>
             </a:pPr>
             <a:r>
+              <a:t>Challenges（主要已解决）&amp; limitations</a:t>
+            </a:r>
+          </a:p>
+        </p:txBody>
+      </p:sp>
+      <p:sp>
+        <p:nvSpPr>
+          <p:cNvPr id="3" name="TextBox 2"/>
+          <p:cNvSpPr txBox="1"/>
+          <p:nvPr/>
+        </p:nvSpPr>
+        <p:spPr>
+          <a:xfrm>
+            <a:off x="640080" y="1188720"/>
+            <a:ext cx="10911535" cy="5303520"/>
+          </a:xfrm>
+          <a:prstGeom prst="rect">
+            <a:avLst/>
+          </a:prstGeom>
+          <a:noFill/>
+        </p:spPr>
+        <p:txBody>
+          <a:bodyPr wrap="square">
+            <a:spAutoFit/>
+          </a:bodyPr>
+          <a:lstStyle/>
+          <a:p>
+            <a:pPr>
+              <a:spcAft>
+                <a:spcPts val="600"/>
+              </a:spcAft>
+              <a:defRPr sz="2000"/>
+            </a:pPr>
+            <a:r>
+              <a:t>挑战：为什么同分布下 TF-IDF 反而更好？—— 已被 E7 消融基本回答</a:t>
+            </a:r>
+          </a:p>
+          <a:p>
+            <a:pPr lvl="1">
+              <a:spcAft>
+                <a:spcPts val="600"/>
+              </a:spcAft>
+              <a:defRPr sz="1800"/>
+            </a:pPr>
+            <a:r>
+              <a:t>截断量化：MiniLM 1.64% 行被截、bge 0.04%，量级不足；主因是题目文本对 embedding 的稀释</a:t>
+            </a:r>
+          </a:p>
+          <a:p>
+            <a:pPr lvl="1">
+              <a:spcAft>
+                <a:spcPts val="600"/>
+              </a:spcAft>
+              <a:defRPr sz="1800"/>
+            </a:pPr>
+            <a:r>
+              <a:t>step-only 下 bge-large 0.711 反超 TF-IDF 0.708；残余问题：PRM800K 步骤可能自带上下文，step-only 为何反而更优值得深挖</a:t>
+            </a:r>
+          </a:p>
+          <a:p>
+            <a:pPr>
+              <a:spcAft>
+                <a:spcPts val="600"/>
+              </a:spcAft>
+              <a:defRPr sz="2000"/>
+            </a:pPr>
+            <a:r>
+              <a:t>训练集天然 28/72 不平衡：50/50 重采样与 class_weight 补查，AUROC 变化 &lt; 0.01</a:t>
+            </a:r>
+          </a:p>
+          <a:p>
+            <a:pPr>
+              <a:spcAft>
+                <a:spcPts val="600"/>
+              </a:spcAft>
+              <a:defRPr sz="2000"/>
+            </a:pPr>
+            <a:r>
+              <a:t>只覆盖静态错误识别；不研究对抗性躲避（需 RL，超出课程范围）；复合偏移不作单因素归因</a:t>
+            </a:r>
+          </a:p>
+        </p:txBody>
+      </p:sp>
+    </p:spTree>
+  </p:cSld>
+  <p:clrMapOvr>
+    <a:masterClrMapping/>
+  </p:clrMapOvr>
+</p:sld>
+</file>
+
+<file path=ppt/slides/slide13.xml><?xml version="1.0" encoding="utf-8"?>
+<p:sld xmlns:a="http://schemas.openxmlformats.org/drawingml/2006/main" xmlns:p="http://schemas.openxmlformats.org/presentationml/2006/main" xmlns:r="http://schemas.openxmlformats.org/officeDocument/2006/relationships">
+  <p:cSld>
+    <p:spTree>
+      <p:nvGrpSpPr>
+        <p:cNvPr id="1" name=""/>
+        <p:cNvGrpSpPr/>
+        <p:nvPr/>
+      </p:nvGrpSpPr>
+      <p:grpSpPr/>
+      <p:sp>
+        <p:nvSpPr>
+          <p:cNvPr id="2" name="TextBox 1"/>
+          <p:cNvSpPr txBox="1"/>
+          <p:nvPr/>
+        </p:nvSpPr>
+        <p:spPr>
+          <a:xfrm>
+            <a:off x="457200" y="228600"/>
+            <a:ext cx="11277295" cy="822960"/>
+          </a:xfrm>
+          <a:prstGeom prst="rect">
+            <a:avLst/>
+          </a:prstGeom>
+          <a:noFill/>
+        </p:spPr>
+        <p:txBody>
+          <a:bodyPr wrap="none">
+            <a:spAutoFit/>
+          </a:bodyPr>
+          <a:lstStyle/>
+          <a:p>
+            <a:pPr>
+              <a:defRPr sz="3200" b="1">
+                <a:solidFill>
+                  <a:srgbClr val="333333"/>
+                </a:solidFill>
+              </a:defRPr>
+            </a:pPr>
+            <a:r>
               <a:t>Requirement checklist</a:t>
             </a:r>
           </a:p>
@@ -3669,6 +3834,17 @@
             </a:r>
           </a:p>
           <a:p>
+            <a:pPr lvl="1">
+              <a:spcAft>
+                <a:spcPts val="600"/>
+              </a:spcAft>
+              <a:defRPr sz="1800"/>
+            </a:pPr>
+            <a:r>
+              <a:t>正文报 AUROC 差（embedding − TF-IDF），即 L = 1 − AUROC：Δ &gt; 0 = 预训练更好，Δ &lt; 0 = TF-IDF 更好</a:t>
+            </a:r>
+          </a:p>
+          <a:p>
             <a:pPr>
               <a:spcAft>
                 <a:spcPts val="600"/>
@@ -4081,45 +4257,21 @@
               </a:defRPr>
             </a:pPr>
             <a:r>
-              <a:t>Result 2: Δ(偏移) — generalization</a:t>
-            </a:r>
-          </a:p>
-        </p:txBody>
-      </p:sp>
-      <p:pic>
-        <p:nvPicPr>
-          <p:cNvPr id="3" name="Picture 2" descr="e3_generalization_svm.png"/>
-          <p:cNvPicPr>
-            <a:picLocks noChangeAspect="1"/>
-          </p:cNvPicPr>
-          <p:nvPr/>
-        </p:nvPicPr>
-        <p:blipFill>
-          <a:blip r:embed="rId2"/>
-          <a:stretch>
-            <a:fillRect/>
-          </a:stretch>
-        </p:blipFill>
-        <p:spPr>
-          <a:xfrm>
-            <a:off x="2366854" y="1188720"/>
-            <a:ext cx="7457987" cy="4206240"/>
-          </a:xfrm>
-          <a:prstGeom prst="rect">
-            <a:avLst/>
-          </a:prstGeom>
-        </p:spPr>
-      </p:pic>
-      <p:sp>
-        <p:nvSpPr>
-          <p:cNvPr id="4" name="TextBox 3"/>
+              <a:t>Result 1c: 输入构造消融（E7，评委意见驱动）</a:t>
+            </a:r>
+          </a:p>
+        </p:txBody>
+      </p:sp>
+      <p:sp>
+        <p:nvSpPr>
+          <p:cNvPr id="3" name="TextBox 2"/>
           <p:cNvSpPr txBox="1"/>
           <p:nvPr/>
         </p:nvSpPr>
         <p:spPr>
           <a:xfrm>
-            <a:off x="640080" y="5486399"/>
-            <a:ext cx="10911535" cy="1280160"/>
+            <a:off x="640080" y="1188720"/>
+            <a:ext cx="10911535" cy="5303520"/>
           </a:xfrm>
           <a:prstGeom prst="rect">
             <a:avLst/>
@@ -4133,26 +4285,79 @@
           <a:lstStyle/>
           <a:p>
             <a:pPr>
-              <a:defRPr sz="1500"/>
-            </a:pPr>
-            <a:r>
-              <a:t>同分布端 TF-IDF 更高（0.696 vs 0.650）；迁移端反转：bge-large 0.571 vs TF-IDF 0.551</a:t>
-            </a:r>
-          </a:p>
-          <a:p>
-            <a:pPr>
-              <a:defRPr sz="1500"/>
-            </a:pPr>
-            <a:r>
-              <a:t>paired bootstrap (1000 次)：bge-large Δ=+0.020 CI[0.018,0.021]，bge-base +0.006 CI[0.004,0.008]，MiniLM −0.001 跨 0</a:t>
-            </a:r>
-          </a:p>
-          <a:p>
-            <a:pPr>
-              <a:defRPr sz="1500"/>
-            </a:pPr>
-            <a:r>
-              <a:t>结论：bge 系迁移端显著反超，MiniLM 不显著；复合偏移不作单因素归因</a:t>
+              <a:spcAft>
+                <a:spcPts val="600"/>
+              </a:spcAft>
+              <a:defRPr sz="1900"/>
+            </a:pPr>
+            <a:r>
+              <a:t>隐患：输入 = 题目 + step（step 在尾部），MiniLM 上限 256 / bge 512 token</a:t>
+            </a:r>
+          </a:p>
+          <a:p>
+            <a:pPr lvl="1">
+              <a:spcAft>
+                <a:spcPts val="600"/>
+              </a:spcAft>
+              <a:defRPr sz="1700"/>
+            </a:pPr>
+            <a:r>
+              <a:t>截断量化：输入中位 89 token；MiniLM 截断 1.64% 行，bge 仅 0.04% → 截断本身解释不了差距</a:t>
+            </a:r>
+          </a:p>
+          <a:p>
+            <a:pPr>
+              <a:spcAft>
+                <a:spcPts val="600"/>
+              </a:spcAft>
+              <a:defRPr sz="1900"/>
+            </a:pPr>
+            <a:r>
+              <a:t>E1 全量点 test AUROC（SVM）：problem+step → step-first → step-only</a:t>
+            </a:r>
+          </a:p>
+          <a:p>
+            <a:pPr lvl="1">
+              <a:spcAft>
+                <a:spcPts val="600"/>
+              </a:spcAft>
+              <a:defRPr sz="1700"/>
+            </a:pPr>
+            <a:r>
+              <a:t>bge-large: 0.651 → 0.677 → 0.711（+0.061）；bge-base: 0.650 → 0.668 → 0.704</a:t>
+            </a:r>
+          </a:p>
+          <a:p>
+            <a:pPr lvl="1">
+              <a:spcAft>
+                <a:spcPts val="600"/>
+              </a:spcAft>
+              <a:defRPr sz="1700"/>
+            </a:pPr>
+            <a:r>
+              <a:t>MiniLM: 0.631 → 0.647 → 0.681；TF-IDF(word): 0.696 → 0.694 → 0.708（仅 +0.012）</a:t>
+            </a:r>
+          </a:p>
+          <a:p>
+            <a:pPr>
+              <a:spcAft>
+                <a:spcPts val="600"/>
+              </a:spcAft>
+              <a:defRPr sz="1900"/>
+            </a:pPr>
+            <a:r>
+              <a:t>主因是题目文本对 embedding 池化的稀释（+0.05 量级），截断贡献很小</a:t>
+            </a:r>
+          </a:p>
+          <a:p>
+            <a:pPr>
+              <a:spcAft>
+                <a:spcPts val="600"/>
+              </a:spcAft>
+              <a:defRPr sz="1900"/>
+            </a:pPr>
+            <a:r>
+              <a:t>step-only 下 bge-large 反超 TF-IDF——同分布负 Δ 大半是输入构造的产物，非表征本身</a:t>
             </a:r>
           </a:p>
         </p:txBody>
@@ -4205,14 +4410,14 @@
               </a:defRPr>
             </a:pPr>
             <a:r>
-              <a:t>Result 2b: train vs test</a:t>
+              <a:t>Result 2: Δ(偏移) — generalization</a:t>
             </a:r>
           </a:p>
         </p:txBody>
       </p:sp>
       <p:pic>
         <p:nvPicPr>
-          <p:cNvPr id="3" name="Picture 2" descr="e3_train_test_svm.png"/>
+          <p:cNvPr id="3" name="Picture 2" descr="e3_generalization_svm.png"/>
           <p:cNvPicPr>
             <a:picLocks noChangeAspect="1"/>
           </p:cNvPicPr>
@@ -4226,8 +4431,8 @@
         </p:blipFill>
         <p:spPr>
           <a:xfrm>
-            <a:off x="1958415" y="1188720"/>
-            <a:ext cx="8274865" cy="4206240"/>
+            <a:off x="2366854" y="1188720"/>
+            <a:ext cx="7457987" cy="4206240"/>
           </a:xfrm>
           <a:prstGeom prst="rect">
             <a:avLst/>
@@ -4260,7 +4465,7 @@
               <a:defRPr sz="1500"/>
             </a:pPr>
             <a:r>
-              <a:t>train−test gap：TF-IDF 0.153–0.168，embedding 仅 0.040–0.065</a:t>
+              <a:t>同分布端 TF-IDF 更高（0.696 vs 0.650）；迁移端反转：bge-large 0.571 vs TF-IDF 0.551</a:t>
             </a:r>
           </a:p>
           <a:p>
@@ -4268,7 +4473,23 @@
               <a:defRPr sz="1500"/>
             </a:pPr>
             <a:r>
-              <a:t>TF-IDF 拟合了大量只在 MATH 内有效的表面特征；embedding 表示更“抗过拟合”，迁移端衰减更小（−0.08 vs −0.14）</a:t>
+              <a:t>paired bootstrap (1000 次)：bge-large Δ=+0.020 CI[0.018,0.021]，bge-base +0.006 CI[0.004,0.008]，MiniLM −0.001 跨 0</a:t>
+            </a:r>
+          </a:p>
+          <a:p>
+            <a:pPr>
+              <a:defRPr sz="1500"/>
+            </a:pPr>
+            <a:r>
+              <a:t>结论：bge 系迁移端显著反超，MiniLM 不显著；复合偏移不作单因素归因</a:t>
+            </a:r>
+          </a:p>
+          <a:p>
+            <a:pPr>
+              <a:defRPr sz="1500"/>
+            </a:pPr>
+            <a:r>
+              <a:t>step-only 输入下（E7 更优构造）：三者全部显著为正——bge-large +0.069 CI[0.067,0.071]，MiniLM 转正 +0.030</a:t>
             </a:r>
           </a:p>
         </p:txBody>
@@ -4321,14 +4542,14 @@
               </a:defRPr>
             </a:pPr>
             <a:r>
-              <a:t>Result 3: Δ(扰动) — robustness</a:t>
+              <a:t>Result 2b: train vs test</a:t>
             </a:r>
           </a:p>
         </p:txBody>
       </p:sp>
       <p:pic>
         <p:nvPicPr>
-          <p:cNvPr id="3" name="Picture 2" descr="e4_robustness_svm.png"/>
+          <p:cNvPr id="3" name="Picture 2" descr="e3_train_test_svm.png"/>
           <p:cNvPicPr>
             <a:picLocks noChangeAspect="1"/>
           </p:cNvPicPr>
@@ -4342,8 +4563,8 @@
         </p:blipFill>
         <p:spPr>
           <a:xfrm>
-            <a:off x="2207772" y="1188720"/>
-            <a:ext cx="7776151" cy="4206240"/>
+            <a:off x="1958415" y="1188720"/>
+            <a:ext cx="8274865" cy="4206240"/>
           </a:xfrm>
           <a:prstGeom prst="rect">
             <a:avLst/>
@@ -4376,7 +4597,7 @@
               <a:defRPr sz="1500"/>
             </a:pPr>
             <a:r>
-              <a:t>规则式扰动（typo / 数字格式 / LaTeX）下所有特征衰减都很小（≤ 0.007 AUROC）</a:t>
+              <a:t>train−test gap：TF-IDF 0.153–0.168，embedding 仅 0.040–0.065</a:t>
             </a:r>
           </a:p>
           <a:p>
@@ -4384,15 +4605,7 @@
               <a:defRPr sz="1500"/>
             </a:pPr>
             <a:r>
-              <a:t>latex / combo 下 embedding 衰减（≤ 0.002）≤ TF-IDF（最大 0.005–0.007）</a:t>
-            </a:r>
-          </a:p>
-          <a:p>
-            <a:pPr>
-              <a:defRPr sz="1500"/>
-            </a:pPr>
-            <a:r>
-              <a:t>结论：embedding 衰减 ≤ TF-IDF——但效应量小，方向性结论</a:t>
+              <a:t>TF-IDF 拟合了大量只在 MATH 内有效的表面特征；embedding 表示更“抗过拟合”，迁移端衰减更小（−0.08 vs −0.14）</a:t>
             </a:r>
           </a:p>
         </p:txBody>
@@ -4445,21 +4658,45 @@
               </a:defRPr>
             </a:pPr>
             <a:r>
-              <a:t>When do pretrained representations help most?</a:t>
-            </a:r>
-          </a:p>
-        </p:txBody>
-      </p:sp>
-      <p:sp>
-        <p:nvSpPr>
-          <p:cNvPr id="3" name="TextBox 2"/>
+              <a:t>Result 3: Δ(扰动) — robustness</a:t>
+            </a:r>
+          </a:p>
+        </p:txBody>
+      </p:sp>
+      <p:pic>
+        <p:nvPicPr>
+          <p:cNvPr id="3" name="Picture 2" descr="e4_robustness_svm.png"/>
+          <p:cNvPicPr>
+            <a:picLocks noChangeAspect="1"/>
+          </p:cNvPicPr>
+          <p:nvPr/>
+        </p:nvPicPr>
+        <p:blipFill>
+          <a:blip r:embed="rId2"/>
+          <a:stretch>
+            <a:fillRect/>
+          </a:stretch>
+        </p:blipFill>
+        <p:spPr>
+          <a:xfrm>
+            <a:off x="2207772" y="1188720"/>
+            <a:ext cx="7776151" cy="4206240"/>
+          </a:xfrm>
+          <a:prstGeom prst="rect">
+            <a:avLst/>
+          </a:prstGeom>
+        </p:spPr>
+      </p:pic>
+      <p:sp>
+        <p:nvSpPr>
+          <p:cNvPr id="4" name="TextBox 3"/>
           <p:cNvSpPr txBox="1"/>
           <p:nvPr/>
         </p:nvSpPr>
         <p:spPr>
           <a:xfrm>
-            <a:off x="640080" y="1188720"/>
-            <a:ext cx="10911535" cy="5303520"/>
+            <a:off x="640080" y="5486399"/>
+            <a:ext cx="10911535" cy="1280160"/>
           </a:xfrm>
           <a:prstGeom prst="rect">
             <a:avLst/>
@@ -4473,57 +4710,26 @@
           <a:lstStyle/>
           <a:p>
             <a:pPr>
-              <a:spcAft>
-                <a:spcPts val="600"/>
-              </a:spcAft>
-              <a:defRPr sz="2000"/>
-            </a:pPr>
-            <a:r>
-              <a:t>量化答案 = 三条 gap 曲线的实测形态</a:t>
-            </a:r>
-          </a:p>
-          <a:p>
-            <a:pPr lvl="1">
-              <a:spcAft>
-                <a:spcPts val="600"/>
-              </a:spcAft>
-              <a:defRPr sz="1800"/>
-            </a:pPr>
-            <a:r>
-              <a:t>n 轴：Δ 最接近 0 处在 n=20（≈ 0，但大家都在随机水平）；随 n 增大走负，full 端 −0.045 ~ −0.064</a:t>
-            </a:r>
-          </a:p>
-          <a:p>
-            <a:pPr lvl="1">
-              <a:spcAft>
-                <a:spcPts val="600"/>
-              </a:spcAft>
-              <a:defRPr sz="1800"/>
-            </a:pPr>
-            <a:r>
-              <a:t>偏移轴：bge-large Δ = +0.020（显著正）；扰动轴：衰减差 ≤ 0.005（embedding 略优）</a:t>
-            </a:r>
-          </a:p>
-          <a:p>
-            <a:pPr>
-              <a:spcAft>
-                <a:spcPts val="600"/>
-              </a:spcAft>
-              <a:defRPr sz="2000"/>
-            </a:pPr>
-            <a:r>
-              <a:t>一句话修正版：预训练特征不是在“数据少”时最值钱，而是在“分布会漂”时最值钱</a:t>
-            </a:r>
-          </a:p>
-          <a:p>
-            <a:pPr>
-              <a:spcAft>
-                <a:spcPts val="600"/>
-              </a:spcAft>
-              <a:defRPr sz="2000"/>
-            </a:pPr>
-            <a:r>
-              <a:t>本任务同分布端收益为负 = 如实报告的边界结论</a:t>
+              <a:defRPr sz="1500"/>
+            </a:pPr>
+            <a:r>
+              <a:t>规则式扰动（typo / 数字格式 / LaTeX）下所有特征衰减都很小（≤ 0.007 AUROC）</a:t>
+            </a:r>
+          </a:p>
+          <a:p>
+            <a:pPr>
+              <a:defRPr sz="1500"/>
+            </a:pPr>
+            <a:r>
+              <a:t>latex / combo 下 embedding 衰减（≤ 0.002）≤ TF-IDF（最大 0.005–0.007）</a:t>
+            </a:r>
+          </a:p>
+          <a:p>
+            <a:pPr>
+              <a:defRPr sz="1500"/>
+            </a:pPr>
+            <a:r>
+              <a:t>结论：embedding 衰减 ≤ TF-IDF——但效应量小，方向性结论</a:t>
             </a:r>
           </a:p>
         </p:txBody>
